--- a/pitch/ParkPulse_Deck.pptx
+++ b/pitch/ParkPulse_Deck.pptx
@@ -3686,7 +3686,7 @@
                 </a:solidFill>
                 <a:latin typeface="Segoe UI"/>
               </a:rPr>
-              <a:t>Long-term · It compounds</a:t>
+              <a:t>By design · Live &amp; self-improving</a:t>
             </a:r>
           </a:p>
         </p:txBody>
@@ -3725,7 +3725,7 @@
                 </a:solidFill>
                 <a:latin typeface="Segoe UI"/>
               </a:rPr>
-              <a:t>It gets better every day</a:t>
+              <a:t>Live, explainable &amp; self-improving</a:t>
             </a:r>
           </a:p>
         </p:txBody>
@@ -3764,7 +3764,7 @@
                 </a:solidFill>
                 <a:latin typeface="Segoe UI"/>
               </a:rPr>
-              <a:t>•  Every new challan sharpens the forecast — a nightly refresh, no heavy retraining.</a:t>
+              <a:t>•  Explainable: tap any team → why it's placed (forecast, junction/main-road impact, trend).</a:t>
             </a:r>
           </a:p>
           <a:p>
@@ -3780,7 +3780,7 @@
                 </a:solidFill>
                 <a:latin typeface="Segoe UI"/>
               </a:rPr>
-              <a:t>•  Deploy in the evenings → new data → the blind spot fills itself.</a:t>
+              <a:t>•  Event-aware: auto-flags unusual days (festivals / match days) above the weekday norm.</a:t>
             </a:r>
           </a:p>
           <a:p>
@@ -3796,7 +3796,23 @@
                 </a:solidFill>
                 <a:latin typeface="Segoe UI"/>
               </a:rPr>
-              <a:t>•  Roadmap: Retrospective (today) → Nightly refresh → Live ASTraM / camera feed.</a:t>
+              <a:t>•  Self-improving: a live ingest endpoint cleans new challans + rebuilds models in seconds.</a:t>
+            </a:r>
+          </a:p>
+          <a:p>
+            <a:pPr algn="l">
+              <a:spcAft>
+                <a:spcPts val="1200"/>
+              </a:spcAft>
+            </a:pPr>
+            <a:r>
+              <a:rPr sz="1900" b="0">
+                <a:solidFill>
+                  <a:srgbClr val="E6E9EF"/>
+                </a:solidFill>
+                <a:latin typeface="Segoe UI"/>
+              </a:rPr>
+              <a:t>•  Integrity: we never modify the fixed competition dataset — ingest is architecture, not run on it.</a:t>
             </a:r>
           </a:p>
         </p:txBody>
@@ -6463,7 +6479,7 @@
                 </a:solidFill>
                 <a:latin typeface="Segoe UI"/>
               </a:rPr>
-              <a:t>•  One click → a spaced patrol plan + CSV for morning roll-call.</a:t>
+              <a:t>•  One click → a spaced patrol plan, shared by WhatsApp / print / CSV at roll-call.</a:t>
             </a:r>
           </a:p>
           <a:p>
@@ -6479,7 +6495,7 @@
                 </a:solidFill>
                 <a:latin typeface="Segoe UI"/>
               </a:rPr>
-              <a:t>•  Repeat-offender target lists (15% → 34%):</a:t>
+              <a:t>•  Explainable: tap any team for why it's placed (forecast load, impact, trend).</a:t>
             </a:r>
           </a:p>
           <a:p>
@@ -6495,7 +6511,7 @@
                 </a:solidFill>
                 <a:latin typeface="Segoe UI"/>
               </a:rPr>
-              <a:t>•  owner-notice / escalated-penalty / tow-priority CSV exports.</a:t>
+              <a:t>•  Repeat-offender target lists (15% → 34%): owner-notice / escalated / tow CSV.</a:t>
             </a:r>
           </a:p>
         </p:txBody>

--- a/pitch/ParkPulse_Deck.pptx
+++ b/pitch/ParkPulse_Deck.pptx
@@ -18,6 +18,7 @@
     <p:sldId id="266" r:id="rId17"/>
     <p:sldId id="267" r:id="rId18"/>
     <p:sldId id="268" r:id="rId19"/>
+    <p:sldId id="269" r:id="rId20"/>
   </p:sldIdLst>
   <p:sldSz cx="12191695" cy="6858000" type="screen4x3"/>
   <p:notesSz cx="6858000" cy="9144000"/>
@@ -3196,8 +3197,8 @@
         </p:nvSpPr>
         <p:spPr>
           <a:xfrm>
-            <a:off x="822960" y="2194560"/>
-            <a:ext cx="10515600" cy="2743200"/>
+            <a:off x="822960" y="2011680"/>
+            <a:ext cx="10789920" cy="2926080"/>
           </a:xfrm>
           <a:prstGeom prst="rect">
             <a:avLst/>
@@ -3248,6 +3249,22 @@
               </a:spcAft>
             </a:pPr>
             <a:r>
+              <a:rPr sz="1600" b="0">
+                <a:solidFill>
+                  <a:srgbClr val="9AA3B2"/>
+                </a:solidFill>
+                <a:latin typeface="Segoe UI"/>
+              </a:rPr>
+              <a:t>Enforcement intelligence for the Bengaluru Traffic Police — built on their own challan data.</a:t>
+            </a:r>
+          </a:p>
+          <a:p>
+            <a:pPr algn="l">
+              <a:spcAft>
+                <a:spcPts val="600"/>
+              </a:spcAft>
+            </a:pPr>
+            <a:r>
               <a:rPr sz="800" b="0">
                 <a:solidFill>
                   <a:srgbClr val="9AA3B2"/>
@@ -3286,7 +3303,7 @@
                 </a:solidFill>
                 <a:latin typeface="Segoe UI"/>
               </a:rPr>
-              <a:t>Gridlock Hackathon 2.0  ·  [Team Name]</a:t>
+              <a:t>Gridlock Hackathon 2.0  ·  TeamX</a:t>
             </a:r>
           </a:p>
         </p:txBody>
@@ -3464,13 +3481,13 @@
               </a:spcAft>
             </a:pPr>
             <a:r>
-              <a:rPr sz="3400" b="1">
+              <a:rPr sz="3200" b="1">
                 <a:solidFill>
                   <a:srgbClr val="E6E9EF"/>
                 </a:solidFill>
                 <a:latin typeface="Segoe UI"/>
               </a:rPr>
-              <a:t>A real AI agent — not a chatbot</a:t>
+              <a:t>A real AI agent over the live models — not a chatbot</a:t>
             </a:r>
           </a:p>
         </p:txBody>
@@ -3483,8 +3500,8 @@
         </p:nvSpPr>
         <p:spPr>
           <a:xfrm>
-            <a:off x="914400" y="2514600"/>
-            <a:ext cx="10241280" cy="3291840"/>
+            <a:off x="914400" y="2468880"/>
+            <a:ext cx="10424160" cy="3474720"/>
           </a:xfrm>
           <a:prstGeom prst="rect">
             <a:avLst/>
@@ -3499,49 +3516,49 @@
           <a:p>
             <a:pPr algn="l">
               <a:spcAft>
-                <a:spcPts val="1200"/>
-              </a:spcAft>
-            </a:pPr>
-            <a:r>
-              <a:rPr sz="1900" b="0">
+                <a:spcPts val="1100"/>
+              </a:spcAft>
+            </a:pPr>
+            <a:r>
+              <a:rPr sz="1800" b="0">
                 <a:solidFill>
                   <a:srgbClr val="E6E9EF"/>
                 </a:solidFill>
                 <a:latin typeface="Segoe UI"/>
               </a:rPr>
-              <a:t>•  Gemini function-calling over the actual forecaster &amp; optimizer.</a:t>
-            </a:r>
-          </a:p>
-          <a:p>
-            <a:pPr algn="l">
-              <a:spcAft>
-                <a:spcPts val="1200"/>
-              </a:spcAft>
-            </a:pPr>
-            <a:r>
-              <a:rPr sz="1900" b="0">
+              <a:t>•  Gemini function-calling runs the actual forecaster &amp; optimizer; every number is grounded in a tool result.</a:t>
+            </a:r>
+          </a:p>
+          <a:p>
+            <a:pPr algn="l">
+              <a:spcAft>
+                <a:spcPts val="1100"/>
+              </a:spcAft>
+            </a:pPr>
+            <a:r>
+              <a:rPr sz="1800" b="0">
                 <a:solidFill>
                   <a:srgbClr val="E6E9EF"/>
                 </a:solidFill>
                 <a:latin typeface="Segoe UI"/>
               </a:rPr>
-              <a:t>•  Multilingual (English / Hindi / Kannada) + voice input + memory.</a:t>
-            </a:r>
-          </a:p>
-          <a:p>
-            <a:pPr algn="l">
-              <a:spcAft>
-                <a:spcPts val="1200"/>
-              </a:spcAft>
-            </a:pPr>
-            <a:r>
-              <a:rPr sz="1900" b="0">
+              <a:t>•  Multilingual (English / Hindi / Kannada) + voice input + conversation memory.</a:t>
+            </a:r>
+          </a:p>
+          <a:p>
+            <a:pPr algn="l">
+              <a:spcAft>
+                <a:spcPts val="1100"/>
+              </a:spcAft>
+            </a:pPr>
+            <a:r>
+              <a:rPr sz="1800" b="0">
                 <a:solidFill>
                   <a:srgbClr val="E6E9EF"/>
                 </a:solidFill>
                 <a:latin typeface="Segoe UI"/>
               </a:rPr>
-              <a:t>•  An officer just asks: 'Plan 6 teams for Friday evening near KR Market.'</a:t>
+              <a:t>•  An officer just asks or says: 'Plan 6 teams for Friday evening near KR Market.'</a:t>
             </a:r>
           </a:p>
         </p:txBody>
@@ -3686,7 +3703,7 @@
                 </a:solidFill>
                 <a:latin typeface="Segoe UI"/>
               </a:rPr>
-              <a:t>By design · Live &amp; self-improving</a:t>
+              <a:t>By design · Integrity</a:t>
             </a:r>
           </a:p>
         </p:txBody>
@@ -3719,7 +3736,7 @@
               </a:spcAft>
             </a:pPr>
             <a:r>
-              <a:rPr sz="3400" b="1">
+              <a:rPr sz="3200" b="1">
                 <a:solidFill>
                   <a:srgbClr val="E6E9EF"/>
                 </a:solidFill>
@@ -3738,8 +3755,8 @@
         </p:nvSpPr>
         <p:spPr>
           <a:xfrm>
-            <a:off x="914400" y="2514600"/>
-            <a:ext cx="10241280" cy="3291840"/>
+            <a:off x="914400" y="2468880"/>
+            <a:ext cx="10424160" cy="3474720"/>
           </a:xfrm>
           <a:prstGeom prst="rect">
             <a:avLst/>
@@ -3754,65 +3771,65 @@
           <a:p>
             <a:pPr algn="l">
               <a:spcAft>
-                <a:spcPts val="1200"/>
-              </a:spcAft>
-            </a:pPr>
-            <a:r>
-              <a:rPr sz="1900" b="0">
+                <a:spcPts val="1100"/>
+              </a:spcAft>
+            </a:pPr>
+            <a:r>
+              <a:rPr sz="1800" b="0">
                 <a:solidFill>
                   <a:srgbClr val="E6E9EF"/>
                 </a:solidFill>
                 <a:latin typeface="Segoe UI"/>
               </a:rPr>
-              <a:t>•  Explainable: tap any team → why it's placed (forecast, junction/main-road impact, trend).</a:t>
-            </a:r>
-          </a:p>
-          <a:p>
-            <a:pPr algn="l">
-              <a:spcAft>
-                <a:spcPts val="1200"/>
-              </a:spcAft>
-            </a:pPr>
-            <a:r>
-              <a:rPr sz="1900" b="0">
+              <a:t>•  Event-aware: auto-flags unusual days (festivals / match days) above the weekday norm.</a:t>
+            </a:r>
+          </a:p>
+          <a:p>
+            <a:pPr algn="l">
+              <a:spcAft>
+                <a:spcPts val="1100"/>
+              </a:spcAft>
+            </a:pPr>
+            <a:r>
+              <a:rPr sz="1800" b="0">
                 <a:solidFill>
                   <a:srgbClr val="E6E9EF"/>
                 </a:solidFill>
                 <a:latin typeface="Segoe UI"/>
               </a:rPr>
-              <a:t>•  Event-aware: auto-flags unusual days (festivals / match days) above the weekday norm.</a:t>
-            </a:r>
-          </a:p>
-          <a:p>
-            <a:pPr algn="l">
-              <a:spcAft>
-                <a:spcPts val="1200"/>
-              </a:spcAft>
-            </a:pPr>
-            <a:r>
-              <a:rPr sz="1900" b="0">
+              <a:t>•  Full-day planner: morning → afternoon → evening at once (361 → 36 → 2) — see the evening blind spot.</a:t>
+            </a:r>
+          </a:p>
+          <a:p>
+            <a:pPr algn="l">
+              <a:spcAft>
+                <a:spcPts val="1100"/>
+              </a:spcAft>
+            </a:pPr>
+            <a:r>
+              <a:rPr sz="1800" b="0">
                 <a:solidFill>
                   <a:srgbClr val="E6E9EF"/>
                 </a:solidFill>
                 <a:latin typeface="Segoe UI"/>
               </a:rPr>
-              <a:t>•  Self-improving: a live ingest endpoint cleans new challans + rebuilds models in seconds.</a:t>
-            </a:r>
-          </a:p>
-          <a:p>
-            <a:pPr algn="l">
-              <a:spcAft>
-                <a:spcPts val="1200"/>
-              </a:spcAft>
-            </a:pPr>
-            <a:r>
-              <a:rPr sz="1900" b="0">
+              <a:t>•  Data flywheel: a live ingest endpoint cleans new challans + rebuilds models in seconds; officers log real outcomes.</a:t>
+            </a:r>
+          </a:p>
+          <a:p>
+            <a:pPr algn="l">
+              <a:spcAft>
+                <a:spcPts val="1100"/>
+              </a:spcAft>
+            </a:pPr>
+            <a:r>
+              <a:rPr sz="1800" b="0">
                 <a:solidFill>
                   <a:srgbClr val="E6E9EF"/>
                 </a:solidFill>
                 <a:latin typeface="Segoe UI"/>
               </a:rPr>
-              <a:t>•  Integrity: we never modify the fixed competition dataset — ingest is architecture, not run on it.</a:t>
+              <a:t>•  Integrity: we never modify the fixed dataset — ingest is live-data architecture, outcome logs in-memory only.</a:t>
             </a:r>
           </a:p>
         </p:txBody>
@@ -3957,7 +3974,7 @@
                 </a:solidFill>
                 <a:latin typeface="Segoe UI"/>
               </a:rPr>
-              <a:t>Feasibility</a:t>
+              <a:t>Architecture &amp; tech · Technical</a:t>
             </a:r>
           </a:p>
         </p:txBody>
@@ -3990,13 +4007,13 @@
               </a:spcAft>
             </a:pPr>
             <a:r>
-              <a:rPr sz="3400" b="1">
+              <a:rPr sz="3200" b="1">
                 <a:solidFill>
                   <a:srgbClr val="E6E9EF"/>
                 </a:solidFill>
                 <a:latin typeface="Segoe UI"/>
               </a:rPr>
-              <a:t>Deployable today</a:t>
+              <a:t>Two front-ends, one brain — small, fast, explainable</a:t>
             </a:r>
           </a:p>
         </p:txBody>
@@ -4009,8 +4026,8 @@
         </p:nvSpPr>
         <p:spPr>
           <a:xfrm>
-            <a:off x="914400" y="2514600"/>
-            <a:ext cx="10241280" cy="3291840"/>
+            <a:off x="914400" y="2468880"/>
+            <a:ext cx="10424160" cy="3474720"/>
           </a:xfrm>
           <a:prstGeom prst="rect">
             <a:avLst/>
@@ -4025,49 +4042,49 @@
           <a:p>
             <a:pPr algn="l">
               <a:spcAft>
-                <a:spcPts val="1200"/>
-              </a:spcAft>
-            </a:pPr>
-            <a:r>
-              <a:rPr sz="1900" b="0">
+                <a:spcPts val="1100"/>
+              </a:spcAft>
+            </a:pPr>
+            <a:r>
+              <a:rPr sz="1800" b="0">
                 <a:solidFill>
                   <a:srgbClr val="E6E9EF"/>
                 </a:solidFill>
                 <a:latin typeface="Segoe UI"/>
               </a:rPr>
-              <a:t>•  Runs on a laptop · only data BTP already collects · no new sensors.</a:t>
-            </a:r>
-          </a:p>
-          <a:p>
-            <a:pPr algn="l">
-              <a:spcAft>
-                <a:spcPts val="1200"/>
-              </a:spcAft>
-            </a:pPr>
-            <a:r>
-              <a:rPr sz="1900" b="0">
+              <a:t>•  One engine (core.py, pandas/numpy): EB-shrinkage forecaster · impact score · spaced greedy optimizer · honest backtest · simulator.</a:t>
+            </a:r>
+          </a:p>
+          <a:p>
+            <a:pPr algn="l">
+              <a:spcAft>
+                <a:spcPts val="1100"/>
+              </a:spcAft>
+            </a:pPr>
+            <a:r>
+              <a:rPr sz="1800" b="0">
                 <a:solidFill>
                   <a:srgbClr val="E6E9EF"/>
                 </a:solidFill>
                 <a:latin typeface="Segoe UI"/>
               </a:rPr>
-              <a:t>•  Two apps share one brain: a live Streamlit demo + a full-stack product.</a:t>
-            </a:r>
-          </a:p>
-          <a:p>
-            <a:pPr algn="l">
-              <a:spcAft>
-                <a:spcPts val="1200"/>
-              </a:spcAft>
-            </a:pPr>
-            <a:r>
-              <a:rPr sz="1900" b="0">
+              <a:t>•  Two apps share it: a live Streamlit demo + full-stack FastAPI (Render) &amp; Next.js 16 / React 19 / deck.gl (Vercel).</a:t>
+            </a:r>
+          </a:p>
+          <a:p>
+            <a:pPr algn="l">
+              <a:spcAft>
+                <a:spcPts val="1100"/>
+              </a:spcAft>
+            </a:pPr>
+            <a:r>
+              <a:rPr sz="1800" b="0">
                 <a:solidFill>
                   <a:srgbClr val="E6E9EF"/>
                 </a:solidFill>
                 <a:latin typeface="Segoe UI"/>
               </a:rPr>
-              <a:t>•  Geohash engine generalizes to any city or violation type.</a:t>
+              <a:t>•  Gemini co-pilot runs server-side over the real models — no GPU, no training pipeline to babysit, no black box.</a:t>
             </a:r>
           </a:p>
         </p:txBody>
@@ -4212,7 +4229,7 @@
                 </a:solidFill>
                 <a:latin typeface="Segoe UI"/>
               </a:rPr>
-              <a:t>Close</a:t>
+              <a:t>Feasibility · rollout</a:t>
             </a:r>
           </a:p>
         </p:txBody>
@@ -4245,13 +4262,13 @@
               </a:spcAft>
             </a:pPr>
             <a:r>
-              <a:rPr sz="3400" b="1">
+              <a:rPr sz="3200" b="1">
                 <a:solidFill>
                   <a:srgbClr val="E6E9EF"/>
                 </a:solidFill>
                 <a:latin typeface="Segoe UI"/>
               </a:rPr>
-              <a:t>Why ParkPulse wins</a:t>
+              <a:t>Deployable today — on data BTP already collects</a:t>
             </a:r>
           </a:p>
         </p:txBody>
@@ -4264,8 +4281,8 @@
         </p:nvSpPr>
         <p:spPr>
           <a:xfrm>
-            <a:off x="914400" y="2514600"/>
-            <a:ext cx="10241280" cy="3291840"/>
+            <a:off x="914400" y="2468880"/>
+            <a:ext cx="10424160" cy="3474720"/>
           </a:xfrm>
           <a:prstGeom prst="rect">
             <a:avLst/>
@@ -4280,59 +4297,346 @@
           <a:p>
             <a:pPr algn="l">
               <a:spcAft>
-                <a:spcPts val="1200"/>
-              </a:spcAft>
-            </a:pPr>
-            <a:r>
-              <a:rPr sz="1900" b="0">
+                <a:spcPts val="1100"/>
+              </a:spcAft>
+            </a:pPr>
+            <a:r>
+              <a:rPr sz="1800" b="0">
                 <a:solidFill>
                   <a:srgbClr val="E6E9EF"/>
                 </a:solidFill>
                 <a:latin typeface="Segoe UI"/>
               </a:rPr>
-              <a:t>•  Feasible — working software today.   Relevant — your data, read honestly.</a:t>
-            </a:r>
-          </a:p>
-          <a:p>
-            <a:pPr algn="l">
-              <a:spcAft>
-                <a:spcPts val="1200"/>
-              </a:spcAft>
-            </a:pPr>
-            <a:r>
-              <a:rPr sz="1900" b="0">
+              <a:t>•  Runs on a laptop · only the existing challan data · no new sensors, no procurement.</a:t>
+            </a:r>
+          </a:p>
+          <a:p>
+            <a:pPr algn="l">
+              <a:spcAft>
+                <a:spcPts val="1100"/>
+              </a:spcAft>
+            </a:pPr>
+            <a:r>
+              <a:rPr sz="1800" b="0">
                 <a:solidFill>
                   <a:srgbClr val="E6E9EF"/>
                 </a:solidFill>
                 <a:latin typeface="Segoe UI"/>
               </a:rPr>
-              <a:t>•  Innovative — a decision loop + an agentic voice co-pilot + a validated proof.</a:t>
-            </a:r>
-          </a:p>
-          <a:p>
-            <a:pPr algn="l">
-              <a:spcAft>
-                <a:spcPts val="1200"/>
-              </a:spcAft>
-            </a:pPr>
-            <a:r>
-              <a:rPr sz="1900" b="0">
+              <a:t>•  Live as a web app today; the full-stack product is deployment-ready (FastAPI on Render + Next.js on Vercel).</a:t>
+            </a:r>
+          </a:p>
+          <a:p>
+            <a:pPr algn="l">
+              <a:spcAft>
+                <a:spcPts val="1100"/>
+              </a:spcAft>
+            </a:pPr>
+            <a:r>
+              <a:rPr sz="1800" b="0">
                 <a:solidFill>
                   <a:srgbClr val="E6E9EF"/>
                 </a:solidFill>
                 <a:latin typeface="Segoe UI"/>
               </a:rPr>
-              <a:t>•  Real impact — a plan you brief tomorrow, a 38% proven gain, offender targeting.</a:t>
-            </a:r>
-          </a:p>
-          <a:p>
-            <a:pPr algn="l">
-              <a:spcAft>
-                <a:spcPts val="1200"/>
-              </a:spcAft>
-            </a:pPr>
-            <a:r>
-              <a:rPr sz="1900" b="0">
+              <a:t>•  The geohash engine generalizes to any city or violation type — not parking-specific.</a:t>
+            </a:r>
+          </a:p>
+          <a:p>
+            <a:pPr algn="l">
+              <a:spcAft>
+                <a:spcPts val="1100"/>
+              </a:spcAft>
+            </a:pPr>
+            <a:r>
+              <a:rPr sz="1800" b="0">
+                <a:solidFill>
+                  <a:srgbClr val="E6E9EF"/>
+                </a:solidFill>
+                <a:latin typeface="Segoe UI"/>
+              </a:rPr>
+              <a:t>•  Next step for BTP: a nightly challan feed + a few evening pilot deployments to start the flywheel.</a:t>
+            </a:r>
+          </a:p>
+        </p:txBody>
+      </p:sp>
+    </p:spTree>
+  </p:cSld>
+  <p:clrMapOvr>
+    <a:masterClrMapping/>
+  </p:clrMapOvr>
+</p:sld>
+</file>
+
+<file path=ppt/slides/slide14.xml><?xml version="1.0" encoding="utf-8"?>
+<p:sld xmlns:a="http://schemas.openxmlformats.org/drawingml/2006/main" xmlns:p="http://schemas.openxmlformats.org/presentationml/2006/main" xmlns:r="http://schemas.openxmlformats.org/officeDocument/2006/relationships">
+  <p:cSld>
+    <p:spTree>
+      <p:nvGrpSpPr>
+        <p:cNvPr id="1" name=""/>
+        <p:cNvGrpSpPr/>
+        <p:nvPr/>
+      </p:nvGrpSpPr>
+      <p:grpSpPr/>
+      <p:sp>
+        <p:nvSpPr>
+          <p:cNvPr id="2" name="Rectangle 1"/>
+          <p:cNvSpPr/>
+          <p:nvPr/>
+        </p:nvSpPr>
+        <p:spPr>
+          <a:xfrm>
+            <a:off x="0" y="0"/>
+            <a:ext cx="12191695" cy="6858000"/>
+          </a:xfrm>
+          <a:prstGeom prst="rect">
+            <a:avLst/>
+          </a:prstGeom>
+          <a:solidFill>
+            <a:srgbClr val="0B0E14"/>
+          </a:solidFill>
+          <a:ln>
+            <a:noFill/>
+          </a:ln>
+          <a:effectLst/>
+        </p:spPr>
+        <p:style>
+          <a:lnRef idx="1">
+            <a:schemeClr val="accent1"/>
+          </a:lnRef>
+          <a:fillRef idx="3">
+            <a:schemeClr val="accent1"/>
+          </a:fillRef>
+          <a:effectRef idx="2">
+            <a:schemeClr val="accent1"/>
+          </a:effectRef>
+          <a:fontRef idx="minor">
+            <a:schemeClr val="lt1"/>
+          </a:fontRef>
+        </p:style>
+        <p:txBody>
+          <a:bodyPr rtlCol="0" anchor="ctr"/>
+          <a:lstStyle/>
+          <a:p>
+            <a:pPr algn="ctr"/>
+          </a:p>
+        </p:txBody>
+      </p:sp>
+      <p:sp>
+        <p:nvSpPr>
+          <p:cNvPr id="3" name="Rectangle 2"/>
+          <p:cNvSpPr/>
+          <p:nvPr/>
+        </p:nvSpPr>
+        <p:spPr>
+          <a:xfrm>
+            <a:off x="640080" y="640080"/>
+            <a:ext cx="502920" cy="82296"/>
+          </a:xfrm>
+          <a:prstGeom prst="rect">
+            <a:avLst/>
+          </a:prstGeom>
+          <a:solidFill>
+            <a:srgbClr val="4C8BF5"/>
+          </a:solidFill>
+          <a:ln>
+            <a:noFill/>
+          </a:ln>
+          <a:effectLst/>
+        </p:spPr>
+        <p:style>
+          <a:lnRef idx="1">
+            <a:schemeClr val="accent1"/>
+          </a:lnRef>
+          <a:fillRef idx="3">
+            <a:schemeClr val="accent1"/>
+          </a:fillRef>
+          <a:effectRef idx="2">
+            <a:schemeClr val="accent1"/>
+          </a:effectRef>
+          <a:fontRef idx="minor">
+            <a:schemeClr val="lt1"/>
+          </a:fontRef>
+        </p:style>
+        <p:txBody>
+          <a:bodyPr rtlCol="0" anchor="ctr"/>
+          <a:lstStyle/>
+          <a:p>
+            <a:pPr algn="ctr"/>
+          </a:p>
+        </p:txBody>
+      </p:sp>
+      <p:sp>
+        <p:nvSpPr>
+          <p:cNvPr id="4" name="TextBox 3"/>
+          <p:cNvSpPr txBox="1"/>
+          <p:nvPr/>
+        </p:nvSpPr>
+        <p:spPr>
+          <a:xfrm>
+            <a:off x="822960" y="868680"/>
+            <a:ext cx="10515600" cy="365760"/>
+          </a:xfrm>
+          <a:prstGeom prst="rect">
+            <a:avLst/>
+          </a:prstGeom>
+          <a:noFill/>
+        </p:spPr>
+        <p:txBody>
+          <a:bodyPr wrap="square" anchor="t">
+            <a:spAutoFit/>
+          </a:bodyPr>
+          <a:lstStyle/>
+          <a:p>
+            <a:pPr algn="l">
+              <a:spcAft>
+                <a:spcPts val="600"/>
+              </a:spcAft>
+            </a:pPr>
+            <a:r>
+              <a:rPr sz="1300" b="1">
+                <a:solidFill>
+                  <a:srgbClr val="4C8BF5"/>
+                </a:solidFill>
+                <a:latin typeface="Segoe UI"/>
+              </a:rPr>
+              <a:t>Close</a:t>
+            </a:r>
+          </a:p>
+        </p:txBody>
+      </p:sp>
+      <p:sp>
+        <p:nvSpPr>
+          <p:cNvPr id="5" name="TextBox 4"/>
+          <p:cNvSpPr txBox="1"/>
+          <p:nvPr/>
+        </p:nvSpPr>
+        <p:spPr>
+          <a:xfrm>
+            <a:off x="822960" y="1234440"/>
+            <a:ext cx="10515600" cy="914400"/>
+          </a:xfrm>
+          <a:prstGeom prst="rect">
+            <a:avLst/>
+          </a:prstGeom>
+          <a:noFill/>
+        </p:spPr>
+        <p:txBody>
+          <a:bodyPr wrap="square" anchor="t">
+            <a:spAutoFit/>
+          </a:bodyPr>
+          <a:lstStyle/>
+          <a:p>
+            <a:pPr algn="l">
+              <a:spcAft>
+                <a:spcPts val="600"/>
+              </a:spcAft>
+            </a:pPr>
+            <a:r>
+              <a:rPr sz="3200" b="1">
+                <a:solidFill>
+                  <a:srgbClr val="E6E9EF"/>
+                </a:solidFill>
+                <a:latin typeface="Segoe UI"/>
+              </a:rPr>
+              <a:t>Why ParkPulse wins</a:t>
+            </a:r>
+          </a:p>
+        </p:txBody>
+      </p:sp>
+      <p:sp>
+        <p:nvSpPr>
+          <p:cNvPr id="6" name="TextBox 5"/>
+          <p:cNvSpPr txBox="1"/>
+          <p:nvPr/>
+        </p:nvSpPr>
+        <p:spPr>
+          <a:xfrm>
+            <a:off x="914400" y="2468880"/>
+            <a:ext cx="10424160" cy="3474720"/>
+          </a:xfrm>
+          <a:prstGeom prst="rect">
+            <a:avLst/>
+          </a:prstGeom>
+          <a:noFill/>
+        </p:spPr>
+        <p:txBody>
+          <a:bodyPr wrap="square" anchor="t">
+            <a:spAutoFit/>
+          </a:bodyPr>
+          <a:lstStyle/>
+          <a:p>
+            <a:pPr algn="l">
+              <a:spcAft>
+                <a:spcPts val="1100"/>
+              </a:spcAft>
+            </a:pPr>
+            <a:r>
+              <a:rPr sz="1800" b="0">
+                <a:solidFill>
+                  <a:srgbClr val="E6E9EF"/>
+                </a:solidFill>
+                <a:latin typeface="Segoe UI"/>
+              </a:rPr>
+              <a:t>•  Feasible — working software today, on data BTP already has, no new hardware.</a:t>
+            </a:r>
+          </a:p>
+          <a:p>
+            <a:pPr algn="l">
+              <a:spcAft>
+                <a:spcPts val="1100"/>
+              </a:spcAft>
+            </a:pPr>
+            <a:r>
+              <a:rPr sz="1800" b="0">
+                <a:solidFill>
+                  <a:srgbClr val="E6E9EF"/>
+                </a:solidFill>
+                <a:latin typeface="Segoe UI"/>
+              </a:rPr>
+              <a:t>•  Relevant — their data, their problem, read honestly (enforcement ≠ demand; evening blind spot named).</a:t>
+            </a:r>
+          </a:p>
+          <a:p>
+            <a:pPr algn="l">
+              <a:spcAft>
+                <a:spcPts val="1100"/>
+              </a:spcAft>
+            </a:pPr>
+            <a:r>
+              <a:rPr sz="1800" b="0">
+                <a:solidFill>
+                  <a:srgbClr val="E6E9EF"/>
+                </a:solidFill>
+                <a:latin typeface="Segoe UI"/>
+              </a:rPr>
+              <a:t>•  Innovative — a closed decision loop + an agentic voice co-pilot + transparency both ways.</a:t>
+            </a:r>
+          </a:p>
+          <a:p>
+            <a:pPr algn="l">
+              <a:spcAft>
+                <a:spcPts val="1100"/>
+              </a:spcAft>
+            </a:pPr>
+            <a:r>
+              <a:rPr sz="1800" b="0">
+                <a:solidFill>
+                  <a:srgbClr val="E6E9EF"/>
+                </a:solidFill>
+                <a:latin typeface="Segoe UI"/>
+              </a:rPr>
+              <a:t>•  Real impact — a plan you brief tomorrow, a 38% validated efficiency gain, offender targeting.</a:t>
+            </a:r>
+          </a:p>
+          <a:p>
+            <a:pPr algn="l">
+              <a:spcAft>
+                <a:spcPts val="1100"/>
+              </a:spcAft>
+            </a:pPr>
+            <a:r>
+              <a:rPr sz="1800" b="0">
                 <a:solidFill>
                   <a:srgbClr val="E6E9EF"/>
                 </a:solidFill>
@@ -4351,7 +4655,7 @@
         </p:nvSpPr>
         <p:spPr>
           <a:xfrm>
-            <a:off x="822960" y="6035040"/>
+            <a:off x="822960" y="6126480"/>
             <a:ext cx="10515600" cy="548640"/>
           </a:xfrm>
           <a:prstGeom prst="rect">
@@ -4555,7 +4859,7 @@
               </a:spcAft>
             </a:pPr>
             <a:r>
-              <a:rPr sz="3400" b="1">
+              <a:rPr sz="3200" b="1">
                 <a:solidFill>
                   <a:srgbClr val="E6E9EF"/>
                 </a:solidFill>
@@ -4574,8 +4878,8 @@
         </p:nvSpPr>
         <p:spPr>
           <a:xfrm>
-            <a:off x="914400" y="2514600"/>
-            <a:ext cx="10241280" cy="3291840"/>
+            <a:off x="914400" y="2468880"/>
+            <a:ext cx="10424160" cy="3474720"/>
           </a:xfrm>
           <a:prstGeom prst="rect">
             <a:avLst/>
@@ -4590,49 +4894,49 @@
           <a:p>
             <a:pPr algn="l">
               <a:spcAft>
-                <a:spcPts val="1200"/>
-              </a:spcAft>
-            </a:pPr>
-            <a:r>
-              <a:rPr sz="1900" b="0">
+                <a:spcPts val="1100"/>
+              </a:spcAft>
+            </a:pPr>
+            <a:r>
+              <a:rPr sz="1800" b="0">
                 <a:solidFill>
                   <a:srgbClr val="E6E9EF"/>
                 </a:solidFill>
                 <a:latin typeface="Segoe UI"/>
               </a:rPr>
-              <a:t>•  Illegal parking near markets, metros &amp; hubs blocks live lanes and junctions.</a:t>
-            </a:r>
-          </a:p>
-          <a:p>
-            <a:pPr algn="l">
-              <a:spcAft>
-                <a:spcPts val="1200"/>
-              </a:spcAft>
-            </a:pPr>
-            <a:r>
-              <a:rPr sz="1900" b="0">
+              <a:t>•  Illegal parking near markets, metros &amp; hubs blocks live lanes and junctions — the city's most visible congestion source.</a:t>
+            </a:r>
+          </a:p>
+          <a:p>
+            <a:pPr algn="l">
+              <a:spcAft>
+                <a:spcPts val="1100"/>
+              </a:spcAft>
+            </a:pPr>
+            <a:r>
+              <a:rPr sz="1800" b="0">
                 <a:solidFill>
                   <a:srgbClr val="E6E9EF"/>
                 </a:solidFill>
                 <a:latin typeface="Segoe UI"/>
               </a:rPr>
-              <a:t>•  Enforcement is reactive &amp; patrol-based — officers go on instinct.</a:t>
-            </a:r>
-          </a:p>
-          <a:p>
-            <a:pPr algn="l">
-              <a:spcAft>
-                <a:spcPts val="1200"/>
-              </a:spcAft>
-            </a:pPr>
-            <a:r>
-              <a:rPr sz="1900" b="0">
+              <a:t>•  Enforcement is reactive &amp; patrol-based: a few teams, a whole division, sent on instinct.</a:t>
+            </a:r>
+          </a:p>
+          <a:p>
+            <a:pPr algn="l">
+              <a:spcAft>
+                <a:spcPts val="1100"/>
+              </a:spcAft>
+            </a:pPr>
+            <a:r>
+              <a:rPr sz="1800" b="0">
                 <a:solidFill>
                   <a:srgbClr val="E6E9EF"/>
                 </a:solidFill>
                 <a:latin typeface="Segoe UI"/>
               </a:rPr>
-              <a:t>•  No heatmap · no prioritization · no way to schedule scarce teams.</a:t>
+              <a:t>•  No city-wide heatmap · no prioritization · no way to schedule scarce teams by where/when parking actually hurts.</a:t>
             </a:r>
           </a:p>
         </p:txBody>
@@ -4810,13 +5114,13 @@
               </a:spcAft>
             </a:pPr>
             <a:r>
-              <a:rPr sz="3400" b="1">
+              <a:rPr sz="3200" b="1">
                 <a:solidFill>
                   <a:srgbClr val="E6E9EF"/>
                 </a:solidFill>
                 <a:latin typeface="Segoe UI"/>
               </a:rPr>
-              <a:t>Built on real BTP data</a:t>
+              <a:t>We didn't invent data — we sharpened theirs</a:t>
             </a:r>
           </a:p>
         </p:txBody>
@@ -4829,8 +5133,8 @@
         </p:nvSpPr>
         <p:spPr>
           <a:xfrm>
-            <a:off x="914400" y="2514600"/>
-            <a:ext cx="10241280" cy="3291840"/>
+            <a:off x="914400" y="2468880"/>
+            <a:ext cx="10424160" cy="3474720"/>
           </a:xfrm>
           <a:prstGeom prst="rect">
             <a:avLst/>
@@ -4845,49 +5149,65 @@
           <a:p>
             <a:pPr algn="l">
               <a:spcAft>
-                <a:spcPts val="1200"/>
-              </a:spcAft>
-            </a:pPr>
-            <a:r>
-              <a:rPr sz="1900" b="0">
+                <a:spcPts val="1100"/>
+              </a:spcAft>
+            </a:pPr>
+            <a:r>
+              <a:rPr sz="1800" b="0">
                 <a:solidFill>
                   <a:srgbClr val="E6E9EF"/>
                 </a:solidFill>
                 <a:latin typeface="Segoe UI"/>
               </a:rPr>
-              <a:t>•  298,445 real violation records · 150 days · zero missing fields.</a:t>
-            </a:r>
-          </a:p>
-          <a:p>
-            <a:pPr algn="l">
-              <a:spcAft>
-                <a:spcPts val="1200"/>
-              </a:spcAft>
-            </a:pPr>
-            <a:r>
-              <a:rPr sz="1900" b="0">
+              <a:t>•  298,445 real BTP violation records · 151 days · 802 zones · zero missing fields.</a:t>
+            </a:r>
+          </a:p>
+          <a:p>
+            <a:pPr algn="l">
+              <a:spcAft>
+                <a:spcPts val="1100"/>
+              </a:spcAft>
+            </a:pPr>
+            <a:r>
+              <a:rPr sz="1800" b="0">
                 <a:solidFill>
                   <a:srgbClr val="E6E9EF"/>
                 </a:solidFill>
                 <a:latin typeface="Segoe UI"/>
               </a:rPr>
-              <a:t>•  Top 1% of locations hold 33% of all violations.</a:t>
-            </a:r>
-          </a:p>
-          <a:p>
-            <a:pPr algn="l">
-              <a:spcAft>
-                <a:spcPts val="1200"/>
-              </a:spcAft>
-            </a:pPr>
-            <a:r>
-              <a:rPr sz="1900" b="0">
+              <a:t>•  Wildly concentrated: the top 1% of locations hold 33% of all violations.</a:t>
+            </a:r>
+          </a:p>
+          <a:p>
+            <a:pPr algn="l">
+              <a:spcAft>
+                <a:spcPts val="1100"/>
+              </a:spcAft>
+            </a:pPr>
+            <a:r>
+              <a:rPr sz="1800" b="0">
                 <a:solidFill>
                   <a:srgbClr val="E6E9EF"/>
                 </a:solidFill>
                 <a:latin typeface="Segoe UI"/>
               </a:rPr>
-              <a:t>•  15% of vehicles cause 34% of them.</a:t>
+              <a:t>•  15% of vehicles cause 34% of violations — a chronic-offender tail.</a:t>
+            </a:r>
+          </a:p>
+          <a:p>
+            <a:pPr algn="l">
+              <a:spcAft>
+                <a:spcPts val="1100"/>
+              </a:spcAft>
+            </a:pPr>
+            <a:r>
+              <a:rPr sz="1800" b="0">
+                <a:solidFill>
+                  <a:srgbClr val="E6E9EF"/>
+                </a:solidFill>
+                <a:latin typeface="Segoe UI"/>
+              </a:rPr>
+              <a:t>•  That concentration is the opportunity: a few well-placed teams cover a disproportionate share.</a:t>
             </a:r>
           </a:p>
         </p:txBody>
@@ -4900,7 +5220,7 @@
         </p:nvSpPr>
         <p:spPr>
           <a:xfrm>
-            <a:off x="822960" y="6035040"/>
+            <a:off x="822960" y="6126480"/>
             <a:ext cx="10515600" cy="548640"/>
           </a:xfrm>
           <a:prstGeom prst="rect">
@@ -5104,13 +5424,13 @@
               </a:spcAft>
             </a:pPr>
             <a:r>
-              <a:rPr sz="3400" b="1">
+              <a:rPr sz="3200" b="1">
                 <a:solidFill>
                   <a:srgbClr val="E6E9EF"/>
                 </a:solidFill>
                 <a:latin typeface="Segoe UI"/>
               </a:rPr>
-              <a:t>We read the data honestly</a:t>
+              <a:t>We read the data for what it is — enforcement, not demand</a:t>
             </a:r>
           </a:p>
         </p:txBody>
@@ -5123,8 +5443,8 @@
         </p:nvSpPr>
         <p:spPr>
           <a:xfrm>
-            <a:off x="914400" y="2514600"/>
-            <a:ext cx="10241280" cy="3291840"/>
+            <a:off x="914400" y="2468880"/>
+            <a:ext cx="10424160" cy="3474720"/>
           </a:xfrm>
           <a:prstGeom prst="rect">
             <a:avLst/>
@@ -5139,49 +5459,65 @@
           <a:p>
             <a:pPr algn="l">
               <a:spcAft>
-                <a:spcPts val="1200"/>
-              </a:spcAft>
-            </a:pPr>
-            <a:r>
-              <a:rPr sz="1900" b="0">
+                <a:spcPts val="1100"/>
+              </a:spcAft>
+            </a:pPr>
+            <a:r>
+              <a:rPr sz="1800" b="0">
                 <a:solidFill>
                   <a:srgbClr val="E6E9EF"/>
                 </a:solidFill>
                 <a:latin typeface="Segoe UI"/>
               </a:rPr>
-              <a:t>•  This is enforcement data, not demand — where officers caught parking.</a:t>
-            </a:r>
-          </a:p>
-          <a:p>
-            <a:pPr algn="l">
-              <a:spcAft>
-                <a:spcPts val="1200"/>
-              </a:spcAft>
-            </a:pPr>
-            <a:r>
-              <a:rPr sz="1900" b="0">
+              <a:t>•  It shows where officers caught parking, not a god's-eye view of where parking is worst.</a:t>
+            </a:r>
+          </a:p>
+          <a:p>
+            <a:pPr algn="l">
+              <a:spcAft>
+                <a:spcPts val="1100"/>
+              </a:spcAft>
+            </a:pPr>
+            <a:r>
+              <a:rPr sz="1800" b="0">
                 <a:solidFill>
                   <a:srgbClr val="E6E9EF"/>
                 </a:solidFill>
                 <a:latin typeface="Segoe UI"/>
               </a:rPr>
-              <a:t>•  ~93% of tickets are written before 1 PM; &lt;0.3% in the 5–9 PM peak.</a:t>
-            </a:r>
-          </a:p>
-          <a:p>
-            <a:pPr algn="l">
-              <a:spcAft>
-                <a:spcPts val="1200"/>
-              </a:spcAft>
-            </a:pPr>
-            <a:r>
-              <a:rPr sz="1900" b="0">
+              <a:t>•  Morning-heavy: ~93% of tickets are written before 1 PM; &lt;0.3% in the 5–9 PM evening peak.</a:t>
+            </a:r>
+          </a:p>
+          <a:p>
+            <a:pPr algn="l">
+              <a:spcAft>
+                <a:spcPts val="1100"/>
+              </a:spcAft>
+            </a:pPr>
+            <a:r>
+              <a:rPr sz="1800" b="0">
                 <a:solidFill>
                   <a:srgbClr val="E6E9EF"/>
                 </a:solidFill>
                 <a:latin typeface="Segoe UI"/>
               </a:rPr>
-              <a:t>•  So we optimize enforcement efficiency and flag the evening blind spot.</a:t>
+              <a:t>•  So we make two honest claims, not one inflated one: optimize the effort you already spend,</a:t>
+            </a:r>
+          </a:p>
+          <a:p>
+            <a:pPr algn="l">
+              <a:spcAft>
+                <a:spcPts val="1100"/>
+              </a:spcAft>
+            </a:pPr>
+            <a:r>
+              <a:rPr sz="1800" b="0">
+                <a:solidFill>
+                  <a:srgbClr val="E6E9EF"/>
+                </a:solidFill>
+                <a:latin typeface="Segoe UI"/>
+              </a:rPr>
+              <a:t>•  and flag the evening blind spot you're missing — instead of pretending to predict the whole city.</a:t>
             </a:r>
           </a:p>
         </p:txBody>
@@ -5359,13 +5695,13 @@
               </a:spcAft>
             </a:pPr>
             <a:r>
-              <a:rPr sz="3400" b="1">
+              <a:rPr sz="3200" b="1">
                 <a:solidFill>
                   <a:srgbClr val="E6E9EF"/>
                 </a:solidFill>
                 <a:latin typeface="Segoe UI"/>
               </a:rPr>
-              <a:t>A closed decision loop — not a dashboard</a:t>
+              <a:t>Not a dashboard — a closed decision loop</a:t>
             </a:r>
           </a:p>
         </p:txBody>
@@ -5378,8 +5714,8 @@
         </p:nvSpPr>
         <p:spPr>
           <a:xfrm>
-            <a:off x="914400" y="2514600"/>
-            <a:ext cx="10241280" cy="3291840"/>
+            <a:off x="914400" y="2468880"/>
+            <a:ext cx="10424160" cy="3474720"/>
           </a:xfrm>
           <a:prstGeom prst="rect">
             <a:avLst/>
@@ -5394,49 +5730,49 @@
           <a:p>
             <a:pPr algn="l">
               <a:spcAft>
-                <a:spcPts val="1200"/>
-              </a:spcAft>
-            </a:pPr>
-            <a:r>
-              <a:rPr sz="1900" b="0">
+                <a:spcPts val="1100"/>
+              </a:spcAft>
+            </a:pPr>
+            <a:r>
+              <a:rPr sz="1800" b="0">
                 <a:solidFill>
                   <a:srgbClr val="E6E9EF"/>
                 </a:solidFill>
                 <a:latin typeface="Segoe UI"/>
               </a:rPr>
-              <a:t>•  Detect → Score → Forecast → Deploy → Target.</a:t>
-            </a:r>
-          </a:p>
-          <a:p>
-            <a:pPr algn="l">
-              <a:spcAft>
-                <a:spcPts val="1200"/>
-              </a:spcAft>
-            </a:pPr>
-            <a:r>
-              <a:rPr sz="1900" b="0">
+              <a:t>•  Detect → Score → Forecast → Deploy → Target → (outcomes feed back).</a:t>
+            </a:r>
+          </a:p>
+          <a:p>
+            <a:pPr algn="l">
+              <a:spcAft>
+                <a:spcPts val="1100"/>
+              </a:spcAft>
+            </a:pPr>
+            <a:r>
+              <a:rPr sz="1800" b="0">
                 <a:solidFill>
                   <a:srgbClr val="E6E9EF"/>
                 </a:solidFill>
                 <a:latin typeface="Segoe UI"/>
               </a:rPr>
-              <a:t>•  It ends in an action a supervisor can brief tomorrow.</a:t>
-            </a:r>
-          </a:p>
-          <a:p>
-            <a:pPr algn="l">
-              <a:spcAft>
-                <a:spcPts val="1200"/>
-              </a:spcAft>
-            </a:pPr>
-            <a:r>
-              <a:rPr sz="1900" b="0">
+              <a:t>•  It ends in an action a supervisor can brief at tomorrow's roll-call, not a chart to stare at.</a:t>
+            </a:r>
+          </a:p>
+          <a:p>
+            <a:pPr algn="l">
+              <a:spcAft>
+                <a:spcPts val="1100"/>
+              </a:spcAft>
+            </a:pPr>
+            <a:r>
+              <a:rPr sz="1800" b="0">
                 <a:solidFill>
                   <a:srgbClr val="E6E9EF"/>
                 </a:solidFill>
                 <a:latin typeface="Segoe UI"/>
               </a:rPr>
-              <a:t>•  Outcomes feed back in and sharpen the next plan.</a:t>
+              <a:t>•  Every stage is transparent and explainable — no black boxes to take on faith.</a:t>
             </a:r>
           </a:p>
         </p:txBody>
@@ -5581,7 +5917,7 @@
                 </a:solidFill>
                 <a:latin typeface="Segoe UI"/>
               </a:rPr>
-              <a:t>Detect &amp; Score</a:t>
+              <a:t>Detect &amp; Score · Technical</a:t>
             </a:r>
           </a:p>
         </p:txBody>
@@ -5614,13 +5950,13 @@
               </a:spcAft>
             </a:pPr>
             <a:r>
-              <a:rPr sz="3400" b="1">
+              <a:rPr sz="3200" b="1">
                 <a:solidFill>
                   <a:srgbClr val="E6E9EF"/>
                 </a:solidFill>
                 <a:latin typeface="Segoe UI"/>
               </a:rPr>
-              <a:t>One transparent number per zone</a:t>
+              <a:t>One transparent number ranks every zone</a:t>
             </a:r>
           </a:p>
         </p:txBody>
@@ -5633,8 +5969,8 @@
         </p:nvSpPr>
         <p:spPr>
           <a:xfrm>
-            <a:off x="914400" y="2514600"/>
-            <a:ext cx="10241280" cy="3291840"/>
+            <a:off x="914400" y="2468880"/>
+            <a:ext cx="10424160" cy="3474720"/>
           </a:xfrm>
           <a:prstGeom prst="rect">
             <a:avLst/>
@@ -5649,49 +5985,65 @@
           <a:p>
             <a:pPr algn="l">
               <a:spcAft>
-                <a:spcPts val="1200"/>
-              </a:spcAft>
-            </a:pPr>
-            <a:r>
-              <a:rPr sz="1900" b="0">
+                <a:spcPts val="1100"/>
+              </a:spcAft>
+            </a:pPr>
+            <a:r>
+              <a:rPr sz="1800" b="0">
                 <a:solidFill>
                   <a:srgbClr val="E6E9EF"/>
                 </a:solidFill>
                 <a:latin typeface="Segoe UI"/>
               </a:rPr>
-              <a:t>•  City-wide 3-D hotspot map (geohash hexbins).</a:t>
-            </a:r>
-          </a:p>
-          <a:p>
-            <a:pPr algn="l">
-              <a:spcAft>
-                <a:spcPts val="1200"/>
-              </a:spcAft>
-            </a:pPr>
-            <a:r>
-              <a:rPr sz="1900" b="0">
+              <a:t>•  City-wide 3-D hotspot map over geohash hexbins (gh6 ≈ 1.2 km, gh7 ≈ 150 m).</a:t>
+            </a:r>
+          </a:p>
+          <a:p>
+            <a:pPr algn="l">
+              <a:spcAft>
+                <a:spcPts val="1100"/>
+              </a:spcAft>
+            </a:pPr>
+            <a:r>
+              <a:rPr sz="1800" b="0">
                 <a:solidFill>
                   <a:srgbClr val="E6E9EF"/>
                 </a:solidFill>
                 <a:latin typeface="Segoe UI"/>
               </a:rPr>
-              <a:t>•  Congestion Impact Score 0–100 = violations × severity × flow-criticality.</a:t>
-            </a:r>
-          </a:p>
-          <a:p>
-            <a:pPr algn="l">
-              <a:spcAft>
-                <a:spcPts val="1200"/>
-              </a:spcAft>
-            </a:pPr>
-            <a:r>
-              <a:rPr sz="1900" b="0">
+              <a:t>•  Congestion Impact Score 0–100 = violations × avg severity × flow-criticality.</a:t>
+            </a:r>
+          </a:p>
+          <a:p>
+            <a:pPr algn="l">
+              <a:spcAft>
+                <a:spcPts val="1100"/>
+              </a:spcAft>
+            </a:pPr>
+            <a:r>
+              <a:rPr sz="1800" b="0">
                 <a:solidFill>
                   <a:srgbClr val="E6E9EF"/>
                 </a:solidFill>
                 <a:latin typeface="Segoe UI"/>
               </a:rPr>
-              <a:t>•  Junction-blocking and main-road violations weigh most.</a:t>
+              <a:t>•  Junction-blocking and main-road violations weigh most — 100 cars on a footpath ≠ 100 blocking a junction.</a:t>
+            </a:r>
+          </a:p>
+          <a:p>
+            <a:pPr algn="l">
+              <a:spcAft>
+                <a:spcPts val="1100"/>
+              </a:spcAft>
+            </a:pPr>
+            <a:r>
+              <a:rPr sz="1800" b="0">
+                <a:solidFill>
+                  <a:srgbClr val="E6E9EF"/>
+                </a:solidFill>
+                <a:latin typeface="Segoe UI"/>
+              </a:rPr>
+              <a:t>•  Fully explainable: anyone can see why a zone scores what it does — no learned weights to defend.</a:t>
             </a:r>
           </a:p>
         </p:txBody>
@@ -5836,7 +6188,7 @@
                 </a:solidFill>
                 <a:latin typeface="Segoe UI"/>
               </a:rPr>
-              <a:t>Forecast · Innovation</a:t>
+              <a:t>Forecast · Innovation + credibility</a:t>
             </a:r>
           </a:p>
         </p:txBody>
@@ -5869,13 +6221,13 @@
               </a:spcAft>
             </a:pPr>
             <a:r>
-              <a:rPr sz="3400" b="1">
+              <a:rPr sz="3200" b="1">
                 <a:solidFill>
                   <a:srgbClr val="E6E9EF"/>
                 </a:solidFill>
                 <a:latin typeface="Segoe UI"/>
               </a:rPr>
-              <a:t>Validated the hard way</a:t>
+              <a:t>A forecast we tested on the future, not the past</a:t>
             </a:r>
           </a:p>
         </p:txBody>
@@ -5888,8 +6240,8 @@
         </p:nvSpPr>
         <p:spPr>
           <a:xfrm>
-            <a:off x="914400" y="2514600"/>
-            <a:ext cx="10241280" cy="3291840"/>
+            <a:off x="914400" y="2468880"/>
+            <a:ext cx="10424160" cy="3474720"/>
           </a:xfrm>
           <a:prstGeom prst="rect">
             <a:avLst/>
@@ -5904,49 +6256,49 @@
           <a:p>
             <a:pPr algn="l">
               <a:spcAft>
-                <a:spcPts val="1200"/>
-              </a:spcAft>
-            </a:pPr>
-            <a:r>
-              <a:rPr sz="1900" b="0">
+                <a:spcPts val="1100"/>
+              </a:spcAft>
+            </a:pPr>
+            <a:r>
+              <a:rPr sz="1800" b="0">
                 <a:solidFill>
                   <a:srgbClr val="E6E9EF"/>
                 </a:solidFill>
                 <a:latin typeface="Segoe UI"/>
               </a:rPr>
-              <a:t>•  Predicts violations per zone × weekday × hour.</a:t>
-            </a:r>
-          </a:p>
-          <a:p>
-            <a:pPr algn="l">
-              <a:spcAft>
-                <a:spcPts val="1200"/>
-              </a:spcAft>
-            </a:pPr>
-            <a:r>
-              <a:rPr sz="1900" b="0">
+              <a:t>•  Predicts violations per zone × weekday × hour via an empirical-Bayes shrinkage model (sparse cells stay stable).</a:t>
+            </a:r>
+          </a:p>
+          <a:p>
+            <a:pPr algn="l">
+              <a:spcAft>
+                <a:spcPts val="1100"/>
+              </a:spcAft>
+            </a:pPr>
+            <a:r>
+              <a:rPr sz="1800" b="0">
                 <a:solidFill>
                   <a:srgbClr val="E6E9EF"/>
                 </a:solidFill>
                 <a:latin typeface="Segoe UI"/>
               </a:rPr>
-              <a:t>•  Honest held-out backtest: r = 0.70, MAE 2.01 — tested on the unseen future.</a:t>
-            </a:r>
-          </a:p>
-          <a:p>
-            <a:pPr algn="l">
-              <a:spcAft>
-                <a:spcPts val="1200"/>
-              </a:spcAft>
-            </a:pPr>
-            <a:r>
-              <a:rPr sz="1900" b="0">
+              <a:t>•  Honest held-out backtest: r = 0.70, MAE 2.01 — trained on early weeks, scored on weeks it never saw.</a:t>
+            </a:r>
+          </a:p>
+          <a:p>
+            <a:pPr algn="l">
+              <a:spcAft>
+                <a:spcPts val="1100"/>
+              </a:spcAft>
+            </a:pPr>
+            <a:r>
+              <a:rPr sz="1800" b="0">
                 <a:solidFill>
                   <a:srgbClr val="E6E9EF"/>
                 </a:solidFill>
                 <a:latin typeface="Segoe UI"/>
               </a:rPr>
-              <a:t>•  Benchmarked LightGBM (scored lower, 0.69) → kept the interpretable model.</a:t>
+              <a:t>•  Benchmarked LightGBM: it scored lower (0.69) and we couldn't explain it → kept the interpretable model.</a:t>
             </a:r>
           </a:p>
         </p:txBody>
@@ -6124,7 +6476,7 @@
               </a:spcAft>
             </a:pPr>
             <a:r>
-              <a:rPr sz="3400" b="1">
+              <a:rPr sz="3200" b="1">
                 <a:solidFill>
                   <a:srgbClr val="E6E9EF"/>
                 </a:solidFill>
@@ -6185,7 +6537,7 @@
                 </a:solidFill>
                 <a:latin typeface="Segoe UI"/>
               </a:rPr>
-              <a:t>captured · 10 teams · on unseen data</a:t>
+              <a:t>captured · 10 teams · 31 unseen days</a:t>
             </a:r>
           </a:p>
         </p:txBody>
@@ -6214,49 +6566,65 @@
           <a:p>
             <a:pPr algn="l">
               <a:spcAft>
-                <a:spcPts val="1200"/>
-              </a:spcAft>
-            </a:pPr>
-            <a:r>
-              <a:rPr sz="1900" b="0">
+                <a:spcPts val="1100"/>
+              </a:spcAft>
+            </a:pPr>
+            <a:r>
+              <a:rPr sz="1800" b="0">
                 <a:solidFill>
                   <a:srgbClr val="E6E9EF"/>
                 </a:solidFill>
                 <a:latin typeface="Segoe UI"/>
               </a:rPr>
-              <a:t>•  Replayed a 10-team plan on 31 days the model never saw.</a:t>
-            </a:r>
-          </a:p>
-          <a:p>
-            <a:pPr algn="l">
-              <a:spcAft>
-                <a:spcPts val="1200"/>
-              </a:spcAft>
-            </a:pPr>
-            <a:r>
-              <a:rPr sz="1900" b="0">
+              <a:t>•  Replayed a 10-team plan across 31 held-out days the model never saw.</a:t>
+            </a:r>
+          </a:p>
+          <a:p>
+            <a:pPr algn="l">
+              <a:spcAft>
+                <a:spcPts val="1100"/>
+              </a:spcAft>
+            </a:pPr>
+            <a:r>
+              <a:rPr sz="1800" b="0">
                 <a:solidFill>
                   <a:srgbClr val="E6E9EF"/>
                 </a:solidFill>
                 <a:latin typeface="Segoe UI"/>
               </a:rPr>
-              <a:t>•  Positioned for ~38% of the violations actually logged…</a:t>
-            </a:r>
-          </a:p>
-          <a:p>
-            <a:pPr algn="l">
-              <a:spcAft>
-                <a:spcPts val="1200"/>
-              </a:spcAft>
-            </a:pPr>
-            <a:r>
-              <a:rPr sz="1900" b="0">
+              <a:t>•  Those teams would have been sitting on ~38% of the violations actually logged…</a:t>
+            </a:r>
+          </a:p>
+          <a:p>
+            <a:pPr algn="l">
+              <a:spcAft>
+                <a:spcPts val="1100"/>
+              </a:spcAft>
+            </a:pPr>
+            <a:r>
+              <a:rPr sz="1800" b="0">
                 <a:solidFill>
                   <a:srgbClr val="E6E9EF"/>
                 </a:solidFill>
                 <a:latin typeface="Segoe UI"/>
               </a:rPr>
-              <a:t>•  …vs ~1.3% spread evenly. A validated efficiency gain.</a:t>
+              <a:t>•  …vs ~1.3% spread evenly (and well above a static 'usual hotspots' plan too).</a:t>
+            </a:r>
+          </a:p>
+          <a:p>
+            <a:pPr algn="l">
+              <a:spcAft>
+                <a:spcPts val="1100"/>
+              </a:spcAft>
+            </a:pPr>
+            <a:r>
+              <a:rPr sz="1800" b="0">
+                <a:solidFill>
+                  <a:srgbClr val="E6E9EF"/>
+                </a:solidFill>
+                <a:latin typeface="Segoe UI"/>
+              </a:rPr>
+              <a:t>•  A validated efficiency gain on unseen data — most teams have zero validation.</a:t>
             </a:r>
           </a:p>
         </p:txBody>
@@ -6401,7 +6769,7 @@
                 </a:solidFill>
                 <a:latin typeface="Segoe UI"/>
               </a:rPr>
-              <a:t>Deploy &amp; Target · Impact</a:t>
+              <a:t>Deploy &amp; Target · Impact + Trust</a:t>
             </a:r>
           </a:p>
         </p:txBody>
@@ -6434,13 +6802,13 @@
               </a:spcAft>
             </a:pPr>
             <a:r>
-              <a:rPr sz="3400" b="1">
+              <a:rPr sz="3200" b="1">
                 <a:solidFill>
                   <a:srgbClr val="E6E9EF"/>
                 </a:solidFill>
                 <a:latin typeface="Segoe UI"/>
               </a:rPr>
-              <a:t>From insight to a plan you brief tomorrow</a:t>
+              <a:t>The deliverable an officer uses — auditable both ways</a:t>
             </a:r>
           </a:p>
         </p:txBody>
@@ -6453,8 +6821,8 @@
         </p:nvSpPr>
         <p:spPr>
           <a:xfrm>
-            <a:off x="914400" y="2514600"/>
-            <a:ext cx="10241280" cy="3291840"/>
+            <a:off x="914400" y="2468880"/>
+            <a:ext cx="10424160" cy="3474720"/>
           </a:xfrm>
           <a:prstGeom prst="rect">
             <a:avLst/>
@@ -6469,49 +6837,65 @@
           <a:p>
             <a:pPr algn="l">
               <a:spcAft>
-                <a:spcPts val="1200"/>
-              </a:spcAft>
-            </a:pPr>
-            <a:r>
-              <a:rPr sz="1900" b="0">
+                <a:spcPts val="1100"/>
+              </a:spcAft>
+            </a:pPr>
+            <a:r>
+              <a:rPr sz="1800" b="0">
                 <a:solidFill>
                   <a:srgbClr val="E6E9EF"/>
                 </a:solidFill>
                 <a:latin typeface="Segoe UI"/>
               </a:rPr>
-              <a:t>•  One click → a spaced patrol plan, shared by WhatsApp / print / CSV at roll-call.</a:t>
-            </a:r>
-          </a:p>
-          <a:p>
-            <a:pPr algn="l">
-              <a:spcAft>
-                <a:spcPts val="1200"/>
-              </a:spcAft>
-            </a:pPr>
-            <a:r>
-              <a:rPr sz="1900" b="0">
+              <a:t>•  One click → a spaced patrol plan (teams ≥600 m apart), shared by WhatsApp / print / CSV at roll-call.</a:t>
+            </a:r>
+          </a:p>
+          <a:p>
+            <a:pPr algn="l">
+              <a:spcAft>
+                <a:spcPts val="1100"/>
+              </a:spcAft>
+            </a:pPr>
+            <a:r>
+              <a:rPr sz="1800" b="0">
                 <a:solidFill>
                   <a:srgbClr val="E6E9EF"/>
                 </a:solidFill>
                 <a:latin typeface="Segoe UI"/>
               </a:rPr>
-              <a:t>•  Explainable: tap any team for why it's placed (forecast load, impact, trend).</a:t>
-            </a:r>
-          </a:p>
-          <a:p>
-            <a:pPr algn="l">
-              <a:spcAft>
-                <a:spcPts val="1200"/>
-              </a:spcAft>
-            </a:pPr>
-            <a:r>
-              <a:rPr sz="1900" b="0">
+              <a:t>•  Why a team IS there: tap it for forecast load · junction/main-road impact · 3-week trend.</a:t>
+            </a:r>
+          </a:p>
+          <a:p>
+            <a:pPr algn="l">
+              <a:spcAft>
+                <a:spcPts val="1100"/>
+              </a:spcAft>
+            </a:pPr>
+            <a:r>
+              <a:rPr sz="1800" b="0">
                 <a:solidFill>
                   <a:srgbClr val="E6E9EF"/>
                 </a:solidFill>
                 <a:latin typeface="Segoe UI"/>
               </a:rPr>
-              <a:t>•  Repeat-offender target lists (15% → 34%): owner-notice / escalated / tow CSV.</a:t>
+              <a:t>•  Why a strong zone ISN'T (new): an 'Also considered' panel shows what just missed and why — auditable, not a black box.</a:t>
+            </a:r>
+          </a:p>
+          <a:p>
+            <a:pPr algn="l">
+              <a:spcAft>
+                <a:spcPts val="1100"/>
+              </a:spcAft>
+            </a:pPr>
+            <a:r>
+              <a:rPr sz="1800" b="0">
+                <a:solidFill>
+                  <a:srgbClr val="E6E9EF"/>
+                </a:solidFill>
+                <a:latin typeface="Segoe UI"/>
+              </a:rPr>
+              <a:t>•  Target chronic offenders (15% → 34%): ready owner-notice / escalated-penalty / tow-priority CSV lists.</a:t>
             </a:r>
           </a:p>
         </p:txBody>

--- a/pitch/ParkPulse_Deck.pptx
+++ b/pitch/ParkPulse_Deck.pptx
@@ -4013,7 +4013,7 @@
                 </a:solidFill>
                 <a:latin typeface="Segoe UI"/>
               </a:rPr>
-              <a:t>Two front-ends, one brain — small, fast, explainable</a:t>
+              <a:t>One engine, two services — small, fast, explainable</a:t>
             </a:r>
           </a:p>
         </p:txBody>
@@ -4068,7 +4068,7 @@
                 </a:solidFill>
                 <a:latin typeface="Segoe UI"/>
               </a:rPr>
-              <a:t>•  Two apps share it: a live Streamlit demo + full-stack FastAPI (Render) &amp; Next.js 16 / React 19 / deck.gl (Vercel).</a:t>
+              <a:t>•  The product: Next.js 16 / React 19 / deck.gl frontend (Vercel) + FastAPI backend (Render) — both call the one engine.</a:t>
             </a:r>
           </a:p>
           <a:p>
@@ -4681,7 +4681,7 @@
                 </a:solidFill>
                 <a:latin typeface="Segoe UI"/>
               </a:rPr>
-              <a:t>Live demo: flipkart-gridlock-20-r2-rinxb9yibzp8knp6quhfew.streamlit.app</a:t>
+              <a:t>Live app: Next.js on Vercel + FastAPI on Render  ·  [Vercel URL]</a:t>
             </a:r>
           </a:p>
         </p:txBody>
